--- a/PPTs/L3-Exercises.pptx
+++ b/PPTs/L3-Exercises.pptx
@@ -2269,13 +2269,6 @@
             </a:r>
           </a:p>
           <a:p>
-            <a:endParaRPr lang="en-GB" dirty="0"/>
-          </a:p>
-          <a:p>
-            <a:r>
-              <a:rPr lang="en-GB" dirty="0" err="1"/>
-              <a:t>acd</a:t>
-            </a:r>
             <a:endParaRPr lang="en-GB" dirty="0"/>
           </a:p>
         </p:txBody>
@@ -9669,7 +9662,7 @@
                 <a:latin typeface="Gill Sans" panose="020B0502020104020203"/>
                 <a:cs typeface="Arial MT"/>
               </a:rPr>
-              <a:t>consist</a:t>
+              <a:t>consists</a:t>
             </a:r>
             <a:r>
               <a:rPr sz="2000" b="0" spc="-35" dirty="0">
@@ -10764,105 +10757,105 @@
                 <a:latin typeface="Gill Sans" panose="020B0502020104020203"/>
                 <a:cs typeface="Arial MT"/>
               </a:rPr>
-              <a:t>before</a:t>
+              <a:t>before t1 executes instruction B of the addition</a:t>
             </a:r>
             <a:r>
               <a:rPr sz="2000" b="0" spc="-20" dirty="0">
                 <a:latin typeface="Gill Sans" panose="020B0502020104020203"/>
                 <a:cs typeface="Arial MT"/>
               </a:rPr>
-              <a:t> </a:t>
+              <a:t/>
             </a:r>
             <a:r>
               <a:rPr sz="2000" b="0" dirty="0">
                 <a:latin typeface="Gill Sans" panose="020B0502020104020203"/>
                 <a:cs typeface="Arial MT"/>
               </a:rPr>
-              <a:t>execution</a:t>
+              <a:t/>
             </a:r>
             <a:r>
               <a:rPr sz="2000" b="0" spc="-15" dirty="0">
                 <a:latin typeface="Gill Sans" panose="020B0502020104020203"/>
                 <a:cs typeface="Arial MT"/>
               </a:rPr>
-              <a:t> </a:t>
+              <a:t/>
             </a:r>
             <a:r>
               <a:rPr sz="2000" b="0" dirty="0">
                 <a:latin typeface="Gill Sans" panose="020B0502020104020203"/>
                 <a:cs typeface="Arial MT"/>
               </a:rPr>
-              <a:t>instruction</a:t>
+              <a:t/>
             </a:r>
             <a:r>
               <a:rPr sz="2000" b="0" spc="-15" dirty="0">
                 <a:latin typeface="Gill Sans" panose="020B0502020104020203"/>
                 <a:cs typeface="Arial MT"/>
               </a:rPr>
-              <a:t> </a:t>
+              <a:t/>
             </a:r>
             <a:r>
               <a:rPr sz="2000" b="0" dirty="0">
                 <a:latin typeface="Gill Sans" panose="020B0502020104020203"/>
                 <a:cs typeface="Arial MT"/>
               </a:rPr>
-              <a:t>B</a:t>
+              <a:t/>
             </a:r>
             <a:r>
               <a:rPr sz="2000" b="0" spc="-15" dirty="0">
                 <a:latin typeface="Gill Sans" panose="020B0502020104020203"/>
                 <a:cs typeface="Arial MT"/>
               </a:rPr>
-              <a:t> </a:t>
+              <a:t/>
             </a:r>
             <a:r>
               <a:rPr sz="2000" b="0" dirty="0">
                 <a:latin typeface="Gill Sans" panose="020B0502020104020203"/>
                 <a:cs typeface="Arial MT"/>
               </a:rPr>
-              <a:t>of</a:t>
+              <a:t/>
             </a:r>
             <a:r>
               <a:rPr sz="2000" b="0" spc="-20" dirty="0">
                 <a:latin typeface="Gill Sans" panose="020B0502020104020203"/>
                 <a:cs typeface="Arial MT"/>
               </a:rPr>
-              <a:t> </a:t>
+              <a:t/>
             </a:r>
             <a:r>
               <a:rPr sz="2000" b="0" dirty="0">
                 <a:latin typeface="Gill Sans" panose="020B0502020104020203"/>
                 <a:cs typeface="Arial MT"/>
               </a:rPr>
-              <a:t>add.</a:t>
+              <a:t/>
             </a:r>
             <a:r>
               <a:rPr sz="2000" b="0" spc="-15" dirty="0">
                 <a:latin typeface="Gill Sans" panose="020B0502020104020203"/>
                 <a:cs typeface="Arial MT"/>
               </a:rPr>
-              <a:t> </a:t>
+              <a:t/>
             </a:r>
             <a:r>
               <a:rPr sz="2000" b="0" dirty="0">
                 <a:latin typeface="Gill Sans" panose="020B0502020104020203"/>
                 <a:cs typeface="Arial MT"/>
               </a:rPr>
-              <a:t>in</a:t>
+              <a:t/>
             </a:r>
             <a:r>
               <a:rPr sz="2000" b="0" spc="-15" dirty="0">
                 <a:latin typeface="Gill Sans" panose="020B0502020104020203"/>
                 <a:cs typeface="Arial MT"/>
               </a:rPr>
-              <a:t> </a:t>
+              <a:t/>
             </a:r>
             <a:r>
               <a:rPr sz="2000" b="0" spc="-25" dirty="0">
                 <a:latin typeface="Gill Sans" panose="020B0502020104020203"/>
                 <a:cs typeface="Arial MT"/>
               </a:rPr>
-              <a:t>t1)</a:t>
+              <a:t>)</a:t>
             </a:r>
             <a:endParaRPr sz="2000" b="0" dirty="0">
               <a:latin typeface="Gill Sans" panose="020B0502020104020203"/>
@@ -13130,14 +13123,14 @@
                 <a:latin typeface="Gill Sans" panose="020B0502020104020203"/>
                 <a:cs typeface="Arial MT"/>
               </a:rPr>
-              <a:t>sem_post</a:t>
+              <a:t>sem_post(&amp;s)).</a:t>
             </a:r>
             <a:r>
               <a:rPr lang="en-GB" sz="2400" b="0" spc="-50" dirty="0">
                 <a:latin typeface="Gill Sans" panose="020B0502020104020203"/>
                 <a:cs typeface="Arial MT"/>
               </a:rPr>
-              <a:t>(&amp;s).</a:t>
+              <a:t/>
             </a:r>
             <a:endParaRPr sz="2400" b="0" dirty="0">
               <a:latin typeface="Gill Sans" panose="020B0502020104020203"/>
@@ -19487,7 +19480,7 @@
                 <a:latin typeface="Courier New"/>
                 <a:cs typeface="Courier New"/>
               </a:rPr>
-              <a:t>(“7"); </a:t>
+              <a:t>("7"); </a:t>
             </a:r>
           </a:p>
           <a:p>
@@ -19634,7 +19627,7 @@
           <a:p>
             <a:r>
               <a:rPr lang="en-GB" dirty="0"/>
-              <a:t>Solution 2(right): s2 has initial value 1, so f2 calls S2.wait() and runs first. The rest of the same as Solution 1. You can see that initializing s2=0 has the same effect as initializing s2=1 and let f2 call S2.wait() first. So Solution 1 is better with one less call to wait().</a:t>
+              <a:t>Solution 2 (right): S2 has initial value 1, so f2 calls S2.wait() and runs first. The rest is the same as in Solution 1. You can see that initializing S2=0 has the same effect as initializing S2=1 and let f2 call S2.wait() first. So Solution 1 is better with one less call to wait().</a:t>
             </a:r>
           </a:p>
         </p:txBody>
@@ -23912,49 +23905,49 @@
                 <a:latin typeface="Gill Sans" panose="020B0502020104020203"/>
                 <a:cs typeface="Arial MT"/>
               </a:rPr>
-              <a:t>lock2</a:t>
+              <a:t>lock1 in line 4</a:t>
             </a:r>
             <a:r>
               <a:rPr sz="2800" b="0" spc="52" baseline="1291" dirty="0">
                 <a:latin typeface="Gill Sans" panose="020B0502020104020203"/>
                 <a:cs typeface="Arial MT"/>
               </a:rPr>
-              <a:t> </a:t>
+              <a:t/>
             </a:r>
             <a:r>
               <a:rPr sz="2800" b="0" baseline="1291" dirty="0">
                 <a:latin typeface="Gill Sans" panose="020B0502020104020203"/>
                 <a:cs typeface="Arial MT"/>
               </a:rPr>
-              <a:t>in</a:t>
+              <a:t/>
             </a:r>
             <a:r>
               <a:rPr sz="2800" b="0" spc="52" baseline="1291" dirty="0">
                 <a:latin typeface="Gill Sans" panose="020B0502020104020203"/>
                 <a:cs typeface="Arial MT"/>
               </a:rPr>
-              <a:t> </a:t>
+              <a:t/>
             </a:r>
             <a:r>
               <a:rPr sz="2800" b="0" baseline="1291" dirty="0">
                 <a:latin typeface="Gill Sans" panose="020B0502020104020203"/>
                 <a:cs typeface="Arial MT"/>
               </a:rPr>
-              <a:t>line</a:t>
+              <a:t/>
             </a:r>
             <a:r>
               <a:rPr sz="2800" b="0" spc="52" baseline="1291" dirty="0">
                 <a:latin typeface="Gill Sans" panose="020B0502020104020203"/>
                 <a:cs typeface="Arial MT"/>
               </a:rPr>
-              <a:t> </a:t>
+              <a:t/>
             </a:r>
             <a:r>
               <a:rPr sz="2800" b="0" baseline="1291" dirty="0">
                 <a:latin typeface="Gill Sans" panose="020B0502020104020203"/>
                 <a:cs typeface="Arial MT"/>
               </a:rPr>
-              <a:t>4</a:t>
+              <a:t/>
             </a:r>
             <a:r>
               <a:rPr lang="en-GB" sz="2800" b="0" spc="52" baseline="1291" dirty="0">
@@ -24045,49 +24038,49 @@
                 <a:latin typeface="Gill Sans" panose="020B0502020104020203"/>
                 <a:cs typeface="Arial MT"/>
               </a:rPr>
-              <a:t>lock1</a:t>
+              <a:t>lock2 in line 5</a:t>
             </a:r>
             <a:r>
               <a:rPr sz="2800" b="0" spc="52" baseline="1291" dirty="0">
                 <a:latin typeface="Gill Sans" panose="020B0502020104020203"/>
                 <a:cs typeface="Arial MT"/>
               </a:rPr>
-              <a:t> </a:t>
+              <a:t/>
             </a:r>
             <a:r>
               <a:rPr sz="2800" b="0" baseline="1291" dirty="0">
                 <a:latin typeface="Gill Sans" panose="020B0502020104020203"/>
                 <a:cs typeface="Arial MT"/>
               </a:rPr>
-              <a:t>in</a:t>
+              <a:t/>
             </a:r>
             <a:r>
               <a:rPr sz="2800" b="0" spc="52" baseline="1291" dirty="0">
                 <a:latin typeface="Gill Sans" panose="020B0502020104020203"/>
                 <a:cs typeface="Arial MT"/>
               </a:rPr>
-              <a:t> </a:t>
+              <a:t/>
             </a:r>
             <a:r>
               <a:rPr sz="2800" b="0" baseline="1291" dirty="0">
                 <a:latin typeface="Gill Sans" panose="020B0502020104020203"/>
                 <a:cs typeface="Arial MT"/>
               </a:rPr>
-              <a:t>line</a:t>
+              <a:t/>
             </a:r>
             <a:r>
               <a:rPr sz="2800" b="0" spc="52" baseline="1291" dirty="0">
                 <a:latin typeface="Gill Sans" panose="020B0502020104020203"/>
                 <a:cs typeface="Arial MT"/>
               </a:rPr>
-              <a:t> </a:t>
+              <a:t/>
             </a:r>
             <a:r>
               <a:rPr sz="2800" b="0" spc="-75" baseline="1291" dirty="0">
                 <a:latin typeface="Gill Sans" panose="020B0502020104020203"/>
                 <a:cs typeface="Arial MT"/>
               </a:rPr>
-              <a:t>5</a:t>
+              <a:t/>
             </a:r>
             <a:endParaRPr lang="en-GB" sz="2800" b="0" spc="-75" baseline="1291" dirty="0">
               <a:latin typeface="Gill Sans" panose="020B0502020104020203"/>
@@ -28395,7 +28388,7 @@
                 <a:latin typeface="Gill Sans" panose="020B0502020104020203"/>
                 <a:cs typeface="Arial MT"/>
               </a:rPr>
-              <a:t> are possible, e.g., t1 grabs lock1, t2 grabs lock2 requests lock 1, t1 requests lock 2)</a:t>
+              <a:t> are possible, e.g., t1 grabs lock1, t2 grabs lock2 and requests lock1, t1 requests lock2)</a:t>
             </a:r>
           </a:p>
           <a:p>
@@ -28502,7 +28495,7 @@
                 <a:latin typeface="Gill Sans" panose="020B0502020104020203"/>
                 <a:ea typeface="ＭＳ Ｐゴシック" charset="0"/>
               </a:rPr>
-              <a:t>t1 runs first to the end, then t2 (or vice versa): x=3, y=3, z=3</a:t>
+              <a:t>t1 runs first to the end, then t2 (or vice versa): x=3, y=3, z=3 (z can also be 1 or 2, see below)</a:t>
             </a:r>
           </a:p>
           <a:p>
@@ -28511,7 +28504,7 @@
                 <a:latin typeface="Gill Sans" panose="020B0502020104020203"/>
                 <a:ea typeface="ＭＳ Ｐゴシック" charset="0"/>
               </a:rPr>
-              <a:t>In t1, lock1.signal() sets lock1=1, lock2.signal() sets lock2=1, this exiting the critical sections protected by lock1 and lock2.</a:t>
+              <a:t>In t1, lock1.signal() sets lock1=1, lock2.signal() sets lock2=1, thus exiting the critical sections protected by lock1 and lock2.</a:t>
             </a:r>
           </a:p>
           <a:p>
@@ -31465,7 +31458,7 @@
                 <a:latin typeface="Courier New" panose="02070309020205020404" pitchFamily="49" charset="0"/>
                 <a:cs typeface="Courier New" panose="02070309020205020404" pitchFamily="49" charset="0"/>
               </a:rPr>
-              <a:t>//Thread T0</a:t>
+              <a:t>//Thread T1</a:t>
             </a:r>
           </a:p>
           <a:p>
@@ -32771,7 +32764,7 @@
           <a:p>
             <a:r>
               <a:rPr lang="en-GB" dirty="0"/>
-              <a:t>Does it achieve one of more of the correctness properties of a concurrent program:</a:t>
+              <a:t>Does it achieve one or more of the correctness properties of a concurrent program:</a:t>
             </a:r>
           </a:p>
           <a:p>
@@ -33901,7 +33894,7 @@
           <a:p>
             <a:r>
               <a:rPr lang="en-GB" dirty="0"/>
-              <a:t>Does it achieve one of more of the correctness properties of a concurrent program:</a:t>
+              <a:t>Does it achieve one or more of the correctness properties of a concurrent program:</a:t>
             </a:r>
           </a:p>
           <a:p>
@@ -36057,7 +36050,7 @@
           <a:p>
             <a:r>
               <a:rPr lang="en-GB" dirty="0"/>
-              <a:t>Does it achieve one of more of the correctness properties of a concurrent program:</a:t>
+              <a:t>Does it achieve one or more of the correctness properties of a concurrent program:</a:t>
             </a:r>
           </a:p>
           <a:p>
@@ -37228,7 +37221,7 @@
           <a:p>
             <a:r>
               <a:rPr lang="en-GB" dirty="0"/>
-              <a:t>Does it achieve one of more of the correctness properties of a concurrent program:</a:t>
+              <a:t>Does it achieve one or more of the correctness properties of a concurrent program:</a:t>
             </a:r>
           </a:p>
           <a:p>
